--- a/PARADISE_presentatie/PARADISE_centra_kort.pptx
+++ b/PARADISE_presentatie/PARADISE_centra_kort.pptx
@@ -71434,7 +71434,7 @@
                 </a:gradFill>
                 <a:latin typeface="Segoe UI"/>
               </a:rPr>
-              <a:t>03</a:t>
+              <a:t>01</a:t>
             </a:r>
           </a:p>
         </p:txBody>

--- a/PARADISE_presentatie/PARADISE_centra_kort.pptx
+++ b/PARADISE_presentatie/PARADISE_centra_kort.pptx
@@ -18582,8 +18582,8 @@
         </p:nvSpPr>
         <p:spPr>
           <a:xfrm>
-            <a:off x="634984" y="5371965"/>
-            <a:ext cx="10921726" cy="736581"/>
+            <a:off x="634984" y="4992194"/>
+            <a:ext cx="10921726" cy="1116352"/>
           </a:xfrm>
           <a:prstGeom prst="roundRect">
             <a:avLst>
@@ -18630,8 +18630,8 @@
         </p:nvSpPr>
         <p:spPr>
           <a:xfrm>
-            <a:off x="952476" y="5549761"/>
-            <a:ext cx="10286742" cy="444488"/>
+            <a:off x="952476" y="5169989"/>
+            <a:ext cx="10286742" cy="760761"/>
           </a:xfrm>
           <a:prstGeom prst="rect">
             <a:avLst/>
@@ -23084,7 +23084,7 @@
         <p:spPr>
           <a:xfrm>
             <a:off x="888977" y="2501837"/>
-            <a:ext cx="5130544" cy="634984"/>
+            <a:ext cx="5130544" cy="736581"/>
           </a:xfrm>
           <a:prstGeom prst="rect">
             <a:avLst/>
@@ -23245,7 +23245,7 @@
         <p:spPr>
           <a:xfrm>
             <a:off x="6425912" y="2501837"/>
-            <a:ext cx="5130544" cy="634984"/>
+            <a:ext cx="5130544" cy="736581"/>
           </a:xfrm>
           <a:prstGeom prst="rect">
             <a:avLst/>
@@ -23406,7 +23406,7 @@
         <p:spPr>
           <a:xfrm>
             <a:off x="888977" y="3936901"/>
-            <a:ext cx="5130544" cy="634984"/>
+            <a:ext cx="5130544" cy="736581"/>
           </a:xfrm>
           <a:prstGeom prst="rect">
             <a:avLst/>
@@ -23567,7 +23567,7 @@
         <p:spPr>
           <a:xfrm>
             <a:off x="6425912" y="3936901"/>
-            <a:ext cx="5130544" cy="634984"/>
+            <a:ext cx="5130544" cy="736581"/>
           </a:xfrm>
           <a:prstGeom prst="rect">
             <a:avLst/>
@@ -23728,7 +23728,7 @@
         <p:spPr>
           <a:xfrm>
             <a:off x="888977" y="5371965"/>
-            <a:ext cx="5130544" cy="634984"/>
+            <a:ext cx="5130544" cy="736581"/>
           </a:xfrm>
           <a:prstGeom prst="rect">
             <a:avLst/>
@@ -23889,7 +23889,7 @@
         <p:spPr>
           <a:xfrm>
             <a:off x="6425912" y="5371965"/>
-            <a:ext cx="5130544" cy="634984"/>
+            <a:ext cx="5130544" cy="736581"/>
           </a:xfrm>
           <a:prstGeom prst="rect">
             <a:avLst/>
@@ -32074,7 +32074,7 @@
                 </a:solidFill>
                 <a:latin typeface="Segoe UI"/>
               </a:rPr>
-              <a:t>Recidief én draagtijd, beide op 18 maanden</a:t>
+              <a:t>Recidief op 18 maanden, draagtijd op 12</a:t>
             </a:r>
           </a:p>
         </p:txBody>

--- a/PARADISE_presentatie/PARADISE_centra_kort.pptx
+++ b/PARADISE_presentatie/PARADISE_centra_kort.pptx
@@ -525,6 +525,17 @@
           <a:lstStyle/>
           <a:p>
             <a:r>
+              <a:t>WAT U ZEGT</a:t>
+            </a:r>
+          </a:p>
+          <a:p>
+            <a:r>
+              <a:t>PARADISE gaat niet over genezen maar over terugkomen. Zes Belgische voetklinieken, honderdvierenveertig patiënten, achttien maanden per patiënt. Ik neem u mee langs het waarom, de meting en het traject. Onderbreek me gerust.</a:t>
+            </a:r>
+          </a:p>
+          <a:p/>
+          <a:p>
+            <a:r>
               <a:t>PRESENTATIETIP</a:t>
             </a:r>
           </a:p>
@@ -611,6 +622,17 @@
           <a:lstStyle/>
           <a:p>
             <a:r>
+              <a:t>WAT U ZEGT</a:t>
+            </a:r>
+          </a:p>
+          <a:p>
+            <a:r>
+              <a:t>Screening en negen visites over achttien maanden. De eerste drie liggen dicht op elkaar. Daarna is het ritme elke drie maanden — hetzelfde ritme als de controle die deze patiënten toch al krijgen.</a:t>
+            </a:r>
+          </a:p>
+          <a:p/>
+          <a:p>
+            <a:r>
               <a:t>PRESENTATIETIP</a:t>
             </a:r>
           </a:p>
@@ -697,6 +719,17 @@
           <a:lstStyle/>
           <a:p>
             <a:r>
+              <a:t>WAT U ZEGT</a:t>
+            </a:r>
+          </a:p>
+          <a:p>
+            <a:r>
+              <a:t>Screening en visite nul. De volgorde ligt vast: screenen, tekenen, geschiktheid bevestigen, en pas dan loten. Vul geen enkel ander formulier in vóór de handtekening. Ook een afwijzing noteert u, want ook dat is studiedata.</a:t>
+            </a:r>
+          </a:p>
+          <a:p/>
+          <a:p>
+            <a:r>
               <a:t>PRESENTATIETIP</a:t>
             </a:r>
           </a:p>
@@ -783,6 +816,17 @@
           <a:lstStyle/>
           <a:p>
             <a:r>
+              <a:t>WAT U ZEGT</a:t>
+            </a:r>
+          </a:p>
+          <a:p>
+            <a:r>
+              <a:t>Visite één, het langste bezoek van de studie. Meten, voorschrijven, vragenlijsten en het eerste educatiegesprek. Twee dingen liggen vast: het voorschrift gebeurt hier en niet later, en NAFF en HLS gaan vóór de educatie.</a:t>
+            </a:r>
+          </a:p>
+          <a:p/>
+          <a:p>
+            <a:r>
               <a:t>PRESENTATIETIP</a:t>
             </a:r>
           </a:p>
@@ -869,6 +913,17 @@
           <a:lstStyle/>
           <a:p>
             <a:r>
+              <a:t>WAT U ZEGT</a:t>
+            </a:r>
+          </a:p>
+          <a:p>
+            <a:r>
+              <a:t>Visite twee, veertien dagen tot één maand later. Technisch het zwaarste bezoek: afleveren, pasvorm in binnen- én buitenschoeisel, meten, aanpassen tot de norm gehaald is. Pas dán gaat de Orthotimer in de zool, en pas dan bestelt u het tweede paar.</a:t>
+            </a:r>
+          </a:p>
+          <a:p/>
+          <a:p>
+            <a:r>
               <a:t>PRESENTATIETIP</a:t>
             </a:r>
           </a:p>
@@ -955,6 +1010,17 @@
           <a:lstStyle/>
           <a:p>
             <a:r>
+              <a:t>WAT U ZEGT</a:t>
+            </a:r>
+          </a:p>
+          <a:p>
+            <a:r>
+              <a:t>Visites drie tot acht, elke drie maanden. Screenen, uitlezen, bespreken, en beide paren zolen beoordelen. Uitlezen kan alleen ter plaatse: een gemiste uitlezing verzwakt de draagtijd van die patiënt over de hele periode.</a:t>
+            </a:r>
+          </a:p>
+          <a:p/>
+          <a:p>
+            <a:r>
               <a:t>PRESENTATIETIP</a:t>
             </a:r>
           </a:p>
@@ -1041,6 +1107,17 @@
           <a:lstStyle/>
           <a:p>
             <a:r>
+              <a:t>WAT U ZEGT</a:t>
+            </a:r>
+          </a:p>
+          <a:p>
+            <a:r>
+              <a:t>Op maand zes, twaalf en achttien komt er een drukmeting bij. Drie keer, niet twee. Dezelfde drie condities, dezelfde toetsing per doelregio. Ligt de piekdruk er weer boven, dan past u opnieuw aan.</a:t>
+            </a:r>
+          </a:p>
+          <a:p/>
+          <a:p>
+            <a:r>
               <a:t>PRESENTATIETIP</a:t>
             </a:r>
           </a:p>
@@ -1127,6 +1204,17 @@
           <a:lstStyle/>
           <a:p>
             <a:r>
+              <a:t>WAT U ZEGT</a:t>
+            </a:r>
+          </a:p>
+          <a:p>
+            <a:r>
+              <a:t>Tien contactmomenten, één zorgpad. Het verschil met vandaag zit niet in hoe vaak u de patiënt ziet, maar in wat u bij elk bezoek wéét: wat de zool doet, en wat er gedragen is.</a:t>
+            </a:r>
+          </a:p>
+          <a:p/>
+          <a:p>
+            <a:r>
               <a:t>PRESENTATIETIP</a:t>
             </a:r>
           </a:p>
@@ -1213,6 +1301,17 @@
           <a:lstStyle/>
           <a:p>
             <a:r>
+              <a:t>WAT U ZEGT</a:t>
+            </a:r>
+          </a:p>
+          <a:p>
+            <a:r>
+              <a:t>Drie toestellen, drie taken. De pedar meet druk, de Orthotimer meet of de zool gedragen is, de MoveMonitor meet hoeveel er gestapt wordt. Alleen de pedar bedient u bij elke meting; de andere twee plaatst u één keer en leest u uit.</a:t>
+            </a:r>
+          </a:p>
+          <a:p/>
+          <a:p>
+            <a:r>
               <a:t>PRESENTATIETIP</a:t>
             </a:r>
           </a:p>
@@ -1299,6 +1398,17 @@
           <a:lstStyle/>
           <a:p>
             <a:r>
+              <a:t>WAT U ZEGT</a:t>
+            </a:r>
+          </a:p>
+          <a:p>
+            <a:r>
+              <a:t>Dit is de enige regel die u écht moet onthouden. De controlegroep krijgt ook een meting en een sensor, maar die getallen blijven dicht. Bespreekt u ze, dan lévert u de interventie. Klinische bevindingen zijn géén meetwaarden: een laesie meldt en behandelt u meteen, in beide groepen.</a:t>
+            </a:r>
+          </a:p>
+          <a:p/>
+          <a:p>
+            <a:r>
               <a:t>PRESENTATIETIP</a:t>
             </a:r>
           </a:p>
@@ -1385,6 +1495,17 @@
           <a:lstStyle/>
           <a:p>
             <a:r>
+              <a:t>WAT U ZEGT</a:t>
+            </a:r>
+          </a:p>
+          <a:p>
+            <a:r>
+              <a:t>Wat u meldt, en hoe snel. Een nieuw ulcus is de primaire uitkomst, dus dat meldt u altijd. Ernstige voorvallen binnen vierentwintig uur na kennisname. En onthoud dit: een afwijking die u meldt is een gegeven, een afwijking die u niet meldt is een fout in de data van de hele studie.</a:t>
+            </a:r>
+          </a:p>
+          <a:p/>
+          <a:p>
+            <a:r>
               <a:t>PRESENTATIETIP</a:t>
             </a:r>
           </a:p>
@@ -1471,6 +1592,17 @@
           <a:lstStyle/>
           <a:p>
             <a:r>
+              <a:t>WAT U ZEGT</a:t>
+            </a:r>
+          </a:p>
+          <a:p>
+            <a:r>
+              <a:t>Dit is de lat voor vandaag. Zes handelingen, en na deze sessie doet u ze zelf. Herkent u er één waarvan u nu al denkt: dat durf ik niet — zeg het dan meteen. Daar is deze sessie voor.</a:t>
+            </a:r>
+          </a:p>
+          <a:p/>
+          <a:p>
+            <a:r>
               <a:t>PRESENTATIETIP</a:t>
             </a:r>
           </a:p>
@@ -1557,6 +1689,17 @@
           <a:lstStyle/>
           <a:p>
             <a:r>
+              <a:t>WAT U ZEGT</a:t>
+            </a:r>
+          </a:p>
+          <a:p>
+            <a:r>
+              <a:t>Vier rollen. De podoloog meet, leest uit en begeleidt. De pedorthist maakt en past aan. De arts bevestigt geschiktheid en beoordeelt laesies. Het management houdt tijd vrij en bewaakt de vierentwintig.</a:t>
+            </a:r>
+          </a:p>
+          <a:p/>
+          <a:p>
+            <a:r>
               <a:t>PRESENTATIETIP</a:t>
             </a:r>
           </a:p>
@@ -1643,6 +1786,17 @@
           <a:lstStyle/>
           <a:p>
             <a:r>
+              <a:t>WAT U ZEGT</a:t>
+            </a:r>
+          </a:p>
+          <a:p>
+            <a:r>
+              <a:t>En dit krijgt u van ons. Training in motiverende gespreksvoering, SOP's per handeling, één contactpunt, en het onderzoeksteam voert de gegevens in. Nul sancties: wijkt u af, dan meldt u het, en dat wordt geregistreerd, niet afgestraft.</a:t>
+            </a:r>
+          </a:p>
+          <a:p/>
+          <a:p>
+            <a:r>
               <a:t>PRESENTATIETIP</a:t>
             </a:r>
           </a:p>
@@ -1729,6 +1883,17 @@
           <a:lstStyle/>
           <a:p>
             <a:r>
+              <a:t>WAT U ZEGT</a:t>
+            </a:r>
+          </a:p>
+          <a:p>
+            <a:r>
+              <a:t>Dit is een vangnet, geen programma. Toon hem alleen als de vragen opdrogen, en beantwoord dan alleen wat nog niet aan bod kwam.</a:t>
+            </a:r>
+          </a:p>
+          <a:p/>
+          <a:p>
+            <a:r>
               <a:t>PRESENTATIETIP</a:t>
             </a:r>
           </a:p>
@@ -1815,6 +1980,17 @@
           <a:lstStyle/>
           <a:p>
             <a:r>
+              <a:t>WAT U ZEGT</a:t>
+            </a:r>
+          </a:p>
+          <a:p>
+            <a:r>
+              <a:t>Rustig zeggen; het is geen dreigement maar een vaststelling. Wij leiden op en wij voeren in. De handelingen zijn van u, vanaf de eerste patiënt.</a:t>
+            </a:r>
+          </a:p>
+          <a:p/>
+          <a:p>
+            <a:r>
               <a:t>PRESENTATIETIP</a:t>
             </a:r>
           </a:p>
@@ -1901,6 +2077,17 @@
           <a:lstStyle/>
           <a:p>
             <a:r>
+              <a:t>WAT U ZEGT</a:t>
+            </a:r>
+          </a:p>
+          <a:p>
+            <a:r>
+              <a:t>Tot slot: wie u aanspreekt. Praktische vragen — inclusies, metingen, formulieren, sensoren — komen bij mij. Wetenschappelijke vragen en afspraken op het niveau van uw centrum bij professor Deschamps. Dank u wel.</a:t>
+            </a:r>
+          </a:p>
+          <a:p/>
+          <a:p>
+            <a:r>
               <a:t>PRESENTATIETIP</a:t>
             </a:r>
           </a:p>
@@ -1987,6 +2174,17 @@
           <a:lstStyle/>
           <a:p>
             <a:r>
+              <a:t>WAT U ZEGT</a:t>
+            </a:r>
+          </a:p>
+          <a:p>
+            <a:r>
+              <a:t>Elke stip is een patiënt. Vierentwintig daarvan komen uit úw kliniek, twaalf in elke arm. Zes keer vierentwintig is honderdvierenveertig. Blijft één centrum achter, dan haalt de studie het niet.</a:t>
+            </a:r>
+          </a:p>
+          <a:p/>
+          <a:p>
+            <a:r>
               <a:t>PRESENTATIETIP</a:t>
             </a:r>
           </a:p>
@@ -2073,6 +2271,17 @@
           <a:lstStyle/>
           <a:p>
             <a:r>
+              <a:t>WAT U ZEGT</a:t>
+            </a:r>
+          </a:p>
+          <a:p>
+            <a:r>
+              <a:t>Veertig procent krijgt binnen één jaar een nieuw ulcus. Na vijf jaar is dat vijfenzestig. En de sterfte ligt tweeënhalf keer hoger dan bij diabetes zonder ulcus. Genezing is dus geen eindpunt maar remissie.</a:t>
+            </a:r>
+          </a:p>
+          <a:p/>
+          <a:p>
+            <a:r>
               <a:t>PRESENTATIETIP</a:t>
             </a:r>
           </a:p>
@@ -2159,6 +2368,17 @@
           <a:lstStyle/>
           <a:p>
             <a:r>
+              <a:t>WAT U ZEGT</a:t>
+            </a:r>
+          </a:p>
+          <a:p>
+            <a:r>
+              <a:t>Belasting is een product, geen optelsom. Piekdruk maal activiteit maal draagtijd. Eén factor op nul maakt het hele product nul. Daarom heeft PARADISE twee normen en niet één.</a:t>
+            </a:r>
+          </a:p>
+          <a:p/>
+          <a:p>
+            <a:r>
               <a:t>PRESENTATIETIP</a:t>
             </a:r>
           </a:p>
@@ -2245,6 +2465,17 @@
           <a:lstStyle/>
           <a:p>
             <a:r>
+              <a:t>WAT U ZEGT</a:t>
+            </a:r>
+          </a:p>
+          <a:p>
+            <a:r>
+              <a:t>Elke sensor geeft een cijfer. Dit is de baseline, blootsvoets: driehonderdtwaalf kilopascal onder metatarsaal twee-drie. Drie metingen per voet, waar de software één beeld van maakt. Hiertegen wordt alles afgezet.</a:t>
+            </a:r>
+          </a:p>
+          <a:p/>
+          <a:p>
+            <a:r>
               <a:t>PRESENTATIETIP</a:t>
             </a:r>
           </a:p>
@@ -2331,6 +2562,17 @@
           <a:lstStyle/>
           <a:p>
             <a:r>
+              <a:t>WAT U ZEGT</a:t>
+            </a:r>
+          </a:p>
+          <a:p>
+            <a:r>
+              <a:t>Zelfde voet, na aanpassing. Honderdzesentachtig kilopascal: veertig procent lager én onder de tweehonderd. De norm geldt per doelregio. Haalt u ze niet, dan past u aan en meet u opnieuw.</a:t>
+            </a:r>
+          </a:p>
+          <a:p/>
+          <a:p>
+            <a:r>
               <a:t>PRESENTATIETIP</a:t>
             </a:r>
           </a:p>
@@ -2417,6 +2659,17 @@
           <a:lstStyle/>
           <a:p>
             <a:r>
+              <a:t>WAT U ZEGT</a:t>
+            </a:r>
+          </a:p>
+          <a:p>
+            <a:r>
+              <a:t>Even stilstaan. Het doel is niet minder belasting. Het doel is belasting op een plek die het aankan. Dat is de hele interventie.</a:t>
+            </a:r>
+          </a:p>
+          <a:p/>
+          <a:p>
+            <a:r>
               <a:t>PRESENTATIETIP</a:t>
             </a:r>
           </a:p>
@@ -2501,6 +2754,17 @@
         <p:txBody>
           <a:bodyPr/>
           <a:lstStyle/>
+          <a:p>
+            <a:r>
+              <a:t>WAT U ZEGT</a:t>
+            </a:r>
+          </a:p>
+          <a:p>
+            <a:r>
+              <a:t>Blok drie: het traject. Negen contactmomenten. Per moment: wat u doet en wat u invult.</a:t>
+            </a:r>
+          </a:p>
+          <a:p/>
           <a:p>
             <a:r>
               <a:t>PRESENTATIETIP</a:t>
@@ -14080,7 +14344,7 @@
                 </a:solidFill>
                 <a:latin typeface="Segoe UI"/>
               </a:rPr>
-              <a:t>Drie extra meetmomenten, niet twee. Maand 18 telt mee: beide co-primaire uitkomsten worden op achttien maanden geëvalueerd.</a:t>
+              <a:t>Drie extra meetmomenten, niet twee. Maand 18 telt mee: het recidief wordt over de volle achttien maanden geteld.</a:t>
             </a:r>
           </a:p>
         </p:txBody>
